--- a/assets/ppt/lex/lex3-regexps-are-trees.pptx
+++ b/assets/ppt/lex/lex3-regexps-are-trees.pptx
@@ -2232,7 +2232,7 @@
           <a:p>
             <a:fld id="{1B6DC762-1116-2146-A47C-D79A5A5DBAFD}" type="datetime1">
               <a:rPr lang="en-CA" smtClean="0"/>
-              <a:t>2020-09-19</a:t>
+              <a:t>2025-06-01</a:t>
             </a:fld>
             <a:endParaRPr lang="en-US"/>
           </a:p>
@@ -2430,7 +2430,7 @@
           <a:p>
             <a:fld id="{725FEDD1-5A1B-2342-BAF0-F7C5511A73CE}" type="datetime1">
               <a:rPr lang="en-CA" smtClean="0"/>
-              <a:t>2020-09-19</a:t>
+              <a:t>2025-06-01</a:t>
             </a:fld>
             <a:endParaRPr lang="en-US"/>
           </a:p>
@@ -2638,7 +2638,7 @@
           <a:p>
             <a:fld id="{F09E59AE-0AE1-4048-8BD6-D39FC0EBB194}" type="datetime1">
               <a:rPr lang="en-CA" smtClean="0"/>
-              <a:t>2020-09-19</a:t>
+              <a:t>2025-06-01</a:t>
             </a:fld>
             <a:endParaRPr lang="en-US"/>
           </a:p>
@@ -4113,7 +4113,7 @@
           <a:p>
             <a:fld id="{A2849525-9B7D-5945-A782-775278635E42}" type="datetime1">
               <a:rPr lang="en-CA" smtClean="0"/>
-              <a:t>2020-09-19</a:t>
+              <a:t>2025-06-01</a:t>
             </a:fld>
             <a:endParaRPr lang="en-US"/>
           </a:p>
@@ -4388,7 +4388,7 @@
           <a:p>
             <a:fld id="{D05E1499-BDD1-6940-8C79-13A8B8E63D57}" type="datetime1">
               <a:rPr lang="en-CA" smtClean="0"/>
-              <a:t>2020-09-19</a:t>
+              <a:t>2025-06-01</a:t>
             </a:fld>
             <a:endParaRPr lang="en-US"/>
           </a:p>
@@ -4653,7 +4653,7 @@
           <a:p>
             <a:fld id="{17E70EF3-18A7-4644-8DA2-1EB9CA66C736}" type="datetime1">
               <a:rPr lang="en-CA" smtClean="0"/>
-              <a:t>2020-09-19</a:t>
+              <a:t>2025-06-01</a:t>
             </a:fld>
             <a:endParaRPr lang="en-US"/>
           </a:p>
@@ -5065,7 +5065,7 @@
           <a:p>
             <a:fld id="{54538FC1-2481-FB4A-91E5-87F3422DE2D5}" type="datetime1">
               <a:rPr lang="en-CA" smtClean="0"/>
-              <a:t>2020-09-19</a:t>
+              <a:t>2025-06-01</a:t>
             </a:fld>
             <a:endParaRPr lang="en-US"/>
           </a:p>
@@ -5206,7 +5206,7 @@
           <a:p>
             <a:fld id="{93D5C515-1622-C840-89B2-A4A55D34866A}" type="datetime1">
               <a:rPr lang="en-CA" smtClean="0"/>
-              <a:t>2020-09-19</a:t>
+              <a:t>2025-06-01</a:t>
             </a:fld>
             <a:endParaRPr lang="en-US"/>
           </a:p>
@@ -5319,7 +5319,7 @@
           <a:p>
             <a:fld id="{B9077E75-6C88-BB47-AC6F-0DCA859E7113}" type="datetime1">
               <a:rPr lang="en-CA" smtClean="0"/>
-              <a:t>2020-09-19</a:t>
+              <a:t>2025-06-01</a:t>
             </a:fld>
             <a:endParaRPr lang="en-US"/>
           </a:p>
@@ -5630,7 +5630,7 @@
           <a:p>
             <a:fld id="{1AD12F8B-7E05-A047-BAC3-EE71BEBBE5BE}" type="datetime1">
               <a:rPr lang="en-CA" smtClean="0"/>
-              <a:t>2020-09-19</a:t>
+              <a:t>2025-06-01</a:t>
             </a:fld>
             <a:endParaRPr lang="en-US"/>
           </a:p>
@@ -5918,7 +5918,7 @@
           <a:p>
             <a:fld id="{C1D9F72A-E93E-B546-8268-6408A6E1DA62}" type="datetime1">
               <a:rPr lang="en-CA" smtClean="0"/>
-              <a:t>2020-09-19</a:t>
+              <a:t>2025-06-01</a:t>
             </a:fld>
             <a:endParaRPr lang="en-US"/>
           </a:p>
@@ -6159,7 +6159,7 @@
           <a:p>
             <a:fld id="{97DF4AC7-DB73-7444-A2A7-FD79FE1A2B2B}" type="datetime1">
               <a:rPr lang="en-CA" smtClean="0"/>
-              <a:t>2020-09-19</a:t>
+              <a:t>2025-06-01</a:t>
             </a:fld>
             <a:endParaRPr lang="en-US"/>
           </a:p>
@@ -14616,6 +14616,76 @@
           </a:p>
         </p:txBody>
       </p:sp>
+      <p:sp>
+        <p:nvSpPr>
+          <p:cNvPr id="2" name="Rounded Rectangular Callout 1">
+            <a:extLst>
+              <a:ext uri="{FF2B5EF4-FFF2-40B4-BE49-F238E27FC236}">
+                <a16:creationId xmlns:a16="http://schemas.microsoft.com/office/drawing/2014/main" id="{8F95EA2C-5C7E-DC64-20F1-62E85D5DE798}"/>
+              </a:ext>
+            </a:extLst>
+          </p:cNvPr>
+          <p:cNvSpPr/>
+          <p:nvPr/>
+        </p:nvSpPr>
+        <p:spPr>
+          <a:xfrm>
+            <a:off x="6640281" y="955212"/>
+            <a:ext cx="2324862" cy="485108"/>
+          </a:xfrm>
+          <a:prstGeom prst="wedgeRoundRectCallout">
+            <a:avLst>
+              <a:gd name="adj1" fmla="val -10144"/>
+              <a:gd name="adj2" fmla="val -97316"/>
+              <a:gd name="adj3" fmla="val 16667"/>
+            </a:avLst>
+          </a:prstGeom>
+        </p:spPr>
+        <p:style>
+          <a:lnRef idx="2">
+            <a:schemeClr val="accent6"/>
+          </a:lnRef>
+          <a:fillRef idx="1">
+            <a:schemeClr val="lt1"/>
+          </a:fillRef>
+          <a:effectRef idx="0">
+            <a:schemeClr val="accent6"/>
+          </a:effectRef>
+          <a:fontRef idx="minor">
+            <a:schemeClr val="dk1"/>
+          </a:fontRef>
+        </p:style>
+        <p:txBody>
+          <a:bodyPr rtlCol="0" anchor="ctr"/>
+          <a:lstStyle/>
+          <a:p>
+            <a:pPr algn="ctr"/>
+            <a:r>
+              <a:rPr lang="en-US" sz="2400" dirty="0">
+                <a:solidFill>
+                  <a:schemeClr val="accent2">
+                    <a:lumMod val="60000"/>
+                    <a:lumOff val="40000"/>
+                  </a:schemeClr>
+                </a:solidFill>
+              </a:rPr>
+              <a:t>R(A|B) </a:t>
+            </a:r>
+            <a:r>
+              <a:rPr lang="en-US" sz="2400" dirty="0"/>
+              <a:t>== </a:t>
+            </a:r>
+            <a:r>
+              <a:rPr lang="en-US" sz="2400" dirty="0">
+                <a:solidFill>
+                  <a:srgbClr val="C00000"/>
+                </a:solidFill>
+              </a:rPr>
+              <a:t>RA|RB</a:t>
+            </a:r>
+          </a:p>
+        </p:txBody>
+      </p:sp>
     </p:spTree>
   </p:cSld>
   <p:clrMapOvr>
@@ -15246,6 +15316,51 @@
                       </p:childTnLst>
                     </p:cTn>
                   </p:par>
+                  <p:par>
+                    <p:cTn id="55" fill="hold">
+                      <p:stCondLst>
+                        <p:cond delay="indefinite"/>
+                      </p:stCondLst>
+                      <p:childTnLst>
+                        <p:par>
+                          <p:cTn id="56" fill="hold">
+                            <p:stCondLst>
+                              <p:cond delay="0"/>
+                            </p:stCondLst>
+                            <p:childTnLst>
+                              <p:par>
+                                <p:cTn id="57" presetID="1" presetClass="entr" presetSubtype="0" fill="hold" grpId="0" nodeType="clickEffect">
+                                  <p:stCondLst>
+                                    <p:cond delay="0"/>
+                                  </p:stCondLst>
+                                  <p:childTnLst>
+                                    <p:set>
+                                      <p:cBhvr>
+                                        <p:cTn id="58" dur="1" fill="hold">
+                                          <p:stCondLst>
+                                            <p:cond delay="0"/>
+                                          </p:stCondLst>
+                                        </p:cTn>
+                                        <p:tgtEl>
+                                          <p:spTgt spid="2"/>
+                                        </p:tgtEl>
+                                        <p:attrNameLst>
+                                          <p:attrName>style.visibility</p:attrName>
+                                        </p:attrNameLst>
+                                      </p:cBhvr>
+                                      <p:to>
+                                        <p:strVal val="visible"/>
+                                      </p:to>
+                                    </p:set>
+                                  </p:childTnLst>
+                                </p:cTn>
+                              </p:par>
+                            </p:childTnLst>
+                          </p:cTn>
+                        </p:par>
+                      </p:childTnLst>
+                    </p:cTn>
+                  </p:par>
                 </p:childTnLst>
               </p:cTn>
               <p:prevCondLst>
@@ -15274,6 +15389,7 @@
       <p:bldP spid="10" grpId="0" animBg="1"/>
       <p:bldP spid="11" grpId="0" animBg="1"/>
       <p:bldP spid="12" grpId="0" animBg="1"/>
+      <p:bldP spid="2" grpId="0" animBg="1"/>
     </p:bldLst>
   </p:timing>
 </p:sld>
